--- a/Experiencia de Aprendizaje 2 - Desarrollo de Agente Inteligentes con AI/Clase 2.1/Clase 2.1.pptx
+++ b/Experiencia de Aprendizaje 2 - Desarrollo de Agente Inteligentes con AI/Clase 2.1/Clase 2.1.pptx
@@ -5,21 +5,22 @@
     <p:sldMasterId id="2147483648" r:id="rId1"/>
   </p:sldMasterIdLst>
   <p:notesMasterIdLst>
-    <p:notesMasterId r:id="rId14"/>
+    <p:notesMasterId r:id="rId15"/>
   </p:notesMasterIdLst>
   <p:sldIdLst>
     <p:sldId id="256" r:id="rId2"/>
     <p:sldId id="258" r:id="rId3"/>
-    <p:sldId id="279" r:id="rId4"/>
-    <p:sldId id="283" r:id="rId5"/>
-    <p:sldId id="284" r:id="rId6"/>
-    <p:sldId id="285" r:id="rId7"/>
-    <p:sldId id="286" r:id="rId8"/>
-    <p:sldId id="287" r:id="rId9"/>
-    <p:sldId id="288" r:id="rId10"/>
-    <p:sldId id="291" r:id="rId11"/>
-    <p:sldId id="292" r:id="rId12"/>
-    <p:sldId id="294" r:id="rId13"/>
+    <p:sldId id="295" r:id="rId4"/>
+    <p:sldId id="279" r:id="rId5"/>
+    <p:sldId id="283" r:id="rId6"/>
+    <p:sldId id="284" r:id="rId7"/>
+    <p:sldId id="285" r:id="rId8"/>
+    <p:sldId id="286" r:id="rId9"/>
+    <p:sldId id="287" r:id="rId10"/>
+    <p:sldId id="288" r:id="rId11"/>
+    <p:sldId id="291" r:id="rId12"/>
+    <p:sldId id="292" r:id="rId13"/>
+    <p:sldId id="294" r:id="rId14"/>
   </p:sldIdLst>
   <p:sldSz cx="12192000" cy="6858000"/>
   <p:notesSz cx="6858000" cy="9144000"/>
@@ -208,7 +209,7 @@
           <a:p>
             <a:fld id="{87BDCB0C-69E9-4911-980B-989A824EA717}" type="datetimeFigureOut">
               <a:rPr lang="es-CL" smtClean="0"/>
-              <a:t>05-04-2026</a:t>
+              <a:t>07-04-2026</a:t>
             </a:fld>
             <a:endParaRPr lang="es-CL"/>
           </a:p>
@@ -481,10 +482,94 @@
   <p:cSld>
     <p:spTree>
       <p:nvGrpSpPr>
+        <p:cNvPr id="1" name=""/>
+        <p:cNvGrpSpPr/>
+        <p:nvPr/>
+      </p:nvGrpSpPr>
+      <p:grpSpPr>
+        <a:xfrm>
+          <a:off x="0" y="0"/>
+          <a:ext cx="0" cy="0"/>
+          <a:chOff x="0" y="0"/>
+          <a:chExt cx="0" cy="0"/>
+        </a:xfrm>
+      </p:grpSpPr>
+      <p:sp>
+        <p:nvSpPr>
+          <p:cNvPr id="2" name="Marcador de imagen de diapositiva 1"/>
+          <p:cNvSpPr>
+            <a:spLocks noGrp="1" noRot="1" noChangeAspect="1"/>
+          </p:cNvSpPr>
+          <p:nvPr>
+            <p:ph type="sldImg"/>
+          </p:nvPr>
+        </p:nvSpPr>
+        <p:spPr/>
+      </p:sp>
+      <p:sp>
+        <p:nvSpPr>
+          <p:cNvPr id="3" name="Marcador de notas 2"/>
+          <p:cNvSpPr>
+            <a:spLocks noGrp="1"/>
+          </p:cNvSpPr>
+          <p:nvPr>
+            <p:ph type="body" idx="1"/>
+          </p:nvPr>
+        </p:nvSpPr>
+        <p:spPr/>
+        <p:txBody>
+          <a:bodyPr/>
+          <a:lstStyle/>
+          <a:p>
+            <a:endParaRPr lang="es-CL" dirty="0"/>
+          </a:p>
+        </p:txBody>
+      </p:sp>
+      <p:sp>
+        <p:nvSpPr>
+          <p:cNvPr id="4" name="Marcador de número de diapositiva 3"/>
+          <p:cNvSpPr>
+            <a:spLocks noGrp="1"/>
+          </p:cNvSpPr>
+          <p:nvPr>
+            <p:ph type="sldNum" sz="quarter" idx="5"/>
+          </p:nvPr>
+        </p:nvSpPr>
+        <p:spPr/>
+        <p:txBody>
+          <a:bodyPr/>
+          <a:lstStyle/>
+          <a:p>
+            <a:fld id="{2107F482-7FF7-4DD4-AE91-ACA70D5B43D5}" type="slidenum">
+              <a:rPr lang="es-CL" smtClean="0"/>
+              <a:t>3</a:t>
+            </a:fld>
+            <a:endParaRPr lang="es-CL"/>
+          </a:p>
+        </p:txBody>
+      </p:sp>
+    </p:spTree>
+    <p:extLst>
+      <p:ext uri="{BB962C8B-B14F-4D97-AF65-F5344CB8AC3E}">
+        <p14:creationId xmlns:p14="http://schemas.microsoft.com/office/powerpoint/2010/main" val="970894122"/>
+      </p:ext>
+    </p:extLst>
+  </p:cSld>
+  <p:clrMapOvr>
+    <a:masterClrMapping/>
+  </p:clrMapOvr>
+</p:notes>
+</file>
+
+<file path=ppt/notesSlides/notesSlide10.xml><?xml version="1.0" encoding="utf-8"?>
+<p:notes xmlns:a="http://schemas.openxmlformats.org/drawingml/2006/main" xmlns:r="http://schemas.openxmlformats.org/officeDocument/2006/relationships" xmlns:p="http://schemas.openxmlformats.org/presentationml/2006/main">
+  <p:cSld>
+    <p:spTree>
+      <p:nvGrpSpPr>
         <p:cNvPr id="1" name="">
           <a:extLst>
             <a:ext uri="{FF2B5EF4-FFF2-40B4-BE49-F238E27FC236}">
-              <a16:creationId xmlns:a16="http://schemas.microsoft.com/office/drawing/2014/main" id="{FA1DEAFD-4343-FCD6-B55B-1DC6ADFA8BF5}"/>
+              <a16:creationId xmlns:a16="http://schemas.microsoft.com/office/drawing/2014/main" id="{D202B77B-5072-5F1C-0F10-0F491EF9CD7B}"/>
             </a:ext>
           </a:extLst>
         </p:cNvPr>
@@ -504,7 +589,7 @@
           <p:cNvPr id="2" name="Marcador de imagen de diapositiva 1">
             <a:extLst>
               <a:ext uri="{FF2B5EF4-FFF2-40B4-BE49-F238E27FC236}">
-                <a16:creationId xmlns:a16="http://schemas.microsoft.com/office/drawing/2014/main" id="{07663F13-E4FB-1728-4F5B-B4AD3446BBDB}"/>
+                <a16:creationId xmlns:a16="http://schemas.microsoft.com/office/drawing/2014/main" id="{07F49A66-BCE5-9419-631E-18BA30ED1CFD}"/>
               </a:ext>
             </a:extLst>
           </p:cNvPr>
@@ -529,7 +614,7 @@
           <p:cNvPr id="3" name="Marcador de notas 2">
             <a:extLst>
               <a:ext uri="{FF2B5EF4-FFF2-40B4-BE49-F238E27FC236}">
-                <a16:creationId xmlns:a16="http://schemas.microsoft.com/office/drawing/2014/main" id="{7582B80E-EEE9-DD0C-FE86-EF7448CEF177}"/>
+                <a16:creationId xmlns:a16="http://schemas.microsoft.com/office/drawing/2014/main" id="{F6441215-2564-E539-3753-60DE68CF8A6D}"/>
               </a:ext>
             </a:extLst>
           </p:cNvPr>
@@ -554,7 +639,7 @@
           <p:cNvPr id="4" name="Marcador de número de diapositiva 3">
             <a:extLst>
               <a:ext uri="{FF2B5EF4-FFF2-40B4-BE49-F238E27FC236}">
-                <a16:creationId xmlns:a16="http://schemas.microsoft.com/office/drawing/2014/main" id="{89470142-9316-8FDA-C204-1A98069595F4}"/>
+                <a16:creationId xmlns:a16="http://schemas.microsoft.com/office/drawing/2014/main" id="{F268D863-15C2-C2CB-8958-1953C0F225CD}"/>
               </a:ext>
             </a:extLst>
           </p:cNvPr>
@@ -572,7 +657,7 @@
           <a:p>
             <a:fld id="{2107F482-7FF7-4DD4-AE91-ACA70D5B43D5}" type="slidenum">
               <a:rPr lang="es-CL" smtClean="0"/>
-              <a:t>3</a:t>
+              <a:t>12</a:t>
             </a:fld>
             <a:endParaRPr lang="es-CL"/>
           </a:p>
@@ -581,7 +666,7 @@
     </p:spTree>
     <p:extLst>
       <p:ext uri="{BB962C8B-B14F-4D97-AF65-F5344CB8AC3E}">
-        <p14:creationId xmlns:p14="http://schemas.microsoft.com/office/powerpoint/2010/main" val="4129676828"/>
+        <p14:creationId xmlns:p14="http://schemas.microsoft.com/office/powerpoint/2010/main" val="2153837920"/>
       </p:ext>
     </p:extLst>
   </p:cSld>
@@ -591,7 +676,7 @@
 </p:notes>
 </file>
 
-<file path=ppt/notesSlides/notesSlide10.xml><?xml version="1.0" encoding="utf-8"?>
+<file path=ppt/notesSlides/notesSlide11.xml><?xml version="1.0" encoding="utf-8"?>
 <p:notes xmlns:a="http://schemas.openxmlformats.org/drawingml/2006/main" xmlns:r="http://schemas.openxmlformats.org/officeDocument/2006/relationships" xmlns:p="http://schemas.openxmlformats.org/presentationml/2006/main">
   <p:cSld>
     <p:spTree>
@@ -687,7 +772,7 @@
           <a:p>
             <a:fld id="{2107F482-7FF7-4DD4-AE91-ACA70D5B43D5}" type="slidenum">
               <a:rPr lang="es-CL" smtClean="0"/>
-              <a:t>12</a:t>
+              <a:t>13</a:t>
             </a:fld>
             <a:endParaRPr lang="es-CL"/>
           </a:p>
@@ -707,6 +792,121 @@
 </file>
 
 <file path=ppt/notesSlides/notesSlide2.xml><?xml version="1.0" encoding="utf-8"?>
+<p:notes xmlns:a="http://schemas.openxmlformats.org/drawingml/2006/main" xmlns:r="http://schemas.openxmlformats.org/officeDocument/2006/relationships" xmlns:p="http://schemas.openxmlformats.org/presentationml/2006/main">
+  <p:cSld>
+    <p:spTree>
+      <p:nvGrpSpPr>
+        <p:cNvPr id="1" name="">
+          <a:extLst>
+            <a:ext uri="{FF2B5EF4-FFF2-40B4-BE49-F238E27FC236}">
+              <a16:creationId xmlns:a16="http://schemas.microsoft.com/office/drawing/2014/main" id="{FA1DEAFD-4343-FCD6-B55B-1DC6ADFA8BF5}"/>
+            </a:ext>
+          </a:extLst>
+        </p:cNvPr>
+        <p:cNvGrpSpPr/>
+        <p:nvPr/>
+      </p:nvGrpSpPr>
+      <p:grpSpPr>
+        <a:xfrm>
+          <a:off x="0" y="0"/>
+          <a:ext cx="0" cy="0"/>
+          <a:chOff x="0" y="0"/>
+          <a:chExt cx="0" cy="0"/>
+        </a:xfrm>
+      </p:grpSpPr>
+      <p:sp>
+        <p:nvSpPr>
+          <p:cNvPr id="2" name="Marcador de imagen de diapositiva 1">
+            <a:extLst>
+              <a:ext uri="{FF2B5EF4-FFF2-40B4-BE49-F238E27FC236}">
+                <a16:creationId xmlns:a16="http://schemas.microsoft.com/office/drawing/2014/main" id="{07663F13-E4FB-1728-4F5B-B4AD3446BBDB}"/>
+              </a:ext>
+            </a:extLst>
+          </p:cNvPr>
+          <p:cNvSpPr>
+            <a:spLocks noGrp="1" noRot="1" noChangeAspect="1"/>
+          </p:cNvSpPr>
+          <p:nvPr>
+            <p:ph type="sldImg"/>
+          </p:nvPr>
+        </p:nvSpPr>
+        <p:spPr/>
+        <p:txBody>
+          <a:bodyPr/>
+          <a:lstStyle/>
+          <a:p>
+            <a:endParaRPr lang="es-CL"/>
+          </a:p>
+        </p:txBody>
+      </p:sp>
+      <p:sp>
+        <p:nvSpPr>
+          <p:cNvPr id="3" name="Marcador de notas 2">
+            <a:extLst>
+              <a:ext uri="{FF2B5EF4-FFF2-40B4-BE49-F238E27FC236}">
+                <a16:creationId xmlns:a16="http://schemas.microsoft.com/office/drawing/2014/main" id="{7582B80E-EEE9-DD0C-FE86-EF7448CEF177}"/>
+              </a:ext>
+            </a:extLst>
+          </p:cNvPr>
+          <p:cNvSpPr>
+            <a:spLocks noGrp="1"/>
+          </p:cNvSpPr>
+          <p:nvPr>
+            <p:ph type="body" idx="1"/>
+          </p:nvPr>
+        </p:nvSpPr>
+        <p:spPr/>
+        <p:txBody>
+          <a:bodyPr/>
+          <a:lstStyle/>
+          <a:p>
+            <a:endParaRPr lang="es-CL" dirty="0"/>
+          </a:p>
+        </p:txBody>
+      </p:sp>
+      <p:sp>
+        <p:nvSpPr>
+          <p:cNvPr id="4" name="Marcador de número de diapositiva 3">
+            <a:extLst>
+              <a:ext uri="{FF2B5EF4-FFF2-40B4-BE49-F238E27FC236}">
+                <a16:creationId xmlns:a16="http://schemas.microsoft.com/office/drawing/2014/main" id="{89470142-9316-8FDA-C204-1A98069595F4}"/>
+              </a:ext>
+            </a:extLst>
+          </p:cNvPr>
+          <p:cNvSpPr>
+            <a:spLocks noGrp="1"/>
+          </p:cNvSpPr>
+          <p:nvPr>
+            <p:ph type="sldNum" sz="quarter" idx="5"/>
+          </p:nvPr>
+        </p:nvSpPr>
+        <p:spPr/>
+        <p:txBody>
+          <a:bodyPr/>
+          <a:lstStyle/>
+          <a:p>
+            <a:fld id="{2107F482-7FF7-4DD4-AE91-ACA70D5B43D5}" type="slidenum">
+              <a:rPr lang="es-CL" smtClean="0"/>
+              <a:t>4</a:t>
+            </a:fld>
+            <a:endParaRPr lang="es-CL"/>
+          </a:p>
+        </p:txBody>
+      </p:sp>
+    </p:spTree>
+    <p:extLst>
+      <p:ext uri="{BB962C8B-B14F-4D97-AF65-F5344CB8AC3E}">
+        <p14:creationId xmlns:p14="http://schemas.microsoft.com/office/powerpoint/2010/main" val="4129676828"/>
+      </p:ext>
+    </p:extLst>
+  </p:cSld>
+  <p:clrMapOvr>
+    <a:masterClrMapping/>
+  </p:clrMapOvr>
+</p:notes>
+</file>
+
+<file path=ppt/notesSlides/notesSlide3.xml><?xml version="1.0" encoding="utf-8"?>
 <p:notes xmlns:a="http://schemas.openxmlformats.org/drawingml/2006/main" xmlns:r="http://schemas.openxmlformats.org/officeDocument/2006/relationships" xmlns:p="http://schemas.openxmlformats.org/presentationml/2006/main">
   <p:cSld>
     <p:spTree>
@@ -802,7 +1002,7 @@
           <a:p>
             <a:fld id="{2107F482-7FF7-4DD4-AE91-ACA70D5B43D5}" type="slidenum">
               <a:rPr lang="es-CL" smtClean="0"/>
-              <a:t>4</a:t>
+              <a:t>5</a:t>
             </a:fld>
             <a:endParaRPr lang="es-CL"/>
           </a:p>
@@ -821,7 +1021,7 @@
 </p:notes>
 </file>
 
-<file path=ppt/notesSlides/notesSlide3.xml><?xml version="1.0" encoding="utf-8"?>
+<file path=ppt/notesSlides/notesSlide4.xml><?xml version="1.0" encoding="utf-8"?>
 <p:notes xmlns:a="http://schemas.openxmlformats.org/drawingml/2006/main" xmlns:r="http://schemas.openxmlformats.org/officeDocument/2006/relationships" xmlns:p="http://schemas.openxmlformats.org/presentationml/2006/main">
   <p:cSld>
     <p:spTree>
@@ -917,7 +1117,7 @@
           <a:p>
             <a:fld id="{2107F482-7FF7-4DD4-AE91-ACA70D5B43D5}" type="slidenum">
               <a:rPr lang="es-CL" smtClean="0"/>
-              <a:t>5</a:t>
+              <a:t>6</a:t>
             </a:fld>
             <a:endParaRPr lang="es-CL"/>
           </a:p>
@@ -936,7 +1136,7 @@
 </p:notes>
 </file>
 
-<file path=ppt/notesSlides/notesSlide4.xml><?xml version="1.0" encoding="utf-8"?>
+<file path=ppt/notesSlides/notesSlide5.xml><?xml version="1.0" encoding="utf-8"?>
 <p:notes xmlns:a="http://schemas.openxmlformats.org/drawingml/2006/main" xmlns:r="http://schemas.openxmlformats.org/officeDocument/2006/relationships" xmlns:p="http://schemas.openxmlformats.org/presentationml/2006/main">
   <p:cSld>
     <p:spTree>
@@ -1032,7 +1232,7 @@
           <a:p>
             <a:fld id="{2107F482-7FF7-4DD4-AE91-ACA70D5B43D5}" type="slidenum">
               <a:rPr lang="es-CL" smtClean="0"/>
-              <a:t>6</a:t>
+              <a:t>7</a:t>
             </a:fld>
             <a:endParaRPr lang="es-CL"/>
           </a:p>
@@ -1051,7 +1251,7 @@
 </p:notes>
 </file>
 
-<file path=ppt/notesSlides/notesSlide5.xml><?xml version="1.0" encoding="utf-8"?>
+<file path=ppt/notesSlides/notesSlide6.xml><?xml version="1.0" encoding="utf-8"?>
 <p:notes xmlns:a="http://schemas.openxmlformats.org/drawingml/2006/main" xmlns:r="http://schemas.openxmlformats.org/officeDocument/2006/relationships" xmlns:p="http://schemas.openxmlformats.org/presentationml/2006/main">
   <p:cSld>
     <p:spTree>
@@ -1147,7 +1347,7 @@
           <a:p>
             <a:fld id="{2107F482-7FF7-4DD4-AE91-ACA70D5B43D5}" type="slidenum">
               <a:rPr lang="es-CL" smtClean="0"/>
-              <a:t>7</a:t>
+              <a:t>8</a:t>
             </a:fld>
             <a:endParaRPr lang="es-CL"/>
           </a:p>
@@ -1166,7 +1366,7 @@
 </p:notes>
 </file>
 
-<file path=ppt/notesSlides/notesSlide6.xml><?xml version="1.0" encoding="utf-8"?>
+<file path=ppt/notesSlides/notesSlide7.xml><?xml version="1.0" encoding="utf-8"?>
 <p:notes xmlns:a="http://schemas.openxmlformats.org/drawingml/2006/main" xmlns:r="http://schemas.openxmlformats.org/officeDocument/2006/relationships" xmlns:p="http://schemas.openxmlformats.org/presentationml/2006/main">
   <p:cSld>
     <p:spTree>
@@ -1262,7 +1462,7 @@
           <a:p>
             <a:fld id="{2107F482-7FF7-4DD4-AE91-ACA70D5B43D5}" type="slidenum">
               <a:rPr lang="es-CL" smtClean="0"/>
-              <a:t>8</a:t>
+              <a:t>9</a:t>
             </a:fld>
             <a:endParaRPr lang="es-CL"/>
           </a:p>
@@ -1281,7 +1481,7 @@
 </p:notes>
 </file>
 
-<file path=ppt/notesSlides/notesSlide7.xml><?xml version="1.0" encoding="utf-8"?>
+<file path=ppt/notesSlides/notesSlide8.xml><?xml version="1.0" encoding="utf-8"?>
 <p:notes xmlns:a="http://schemas.openxmlformats.org/drawingml/2006/main" xmlns:r="http://schemas.openxmlformats.org/officeDocument/2006/relationships" xmlns:p="http://schemas.openxmlformats.org/presentationml/2006/main">
   <p:cSld>
     <p:spTree>
@@ -1377,7 +1577,7 @@
           <a:p>
             <a:fld id="{2107F482-7FF7-4DD4-AE91-ACA70D5B43D5}" type="slidenum">
               <a:rPr lang="es-CL" smtClean="0"/>
-              <a:t>9</a:t>
+              <a:t>10</a:t>
             </a:fld>
             <a:endParaRPr lang="es-CL"/>
           </a:p>
@@ -1396,7 +1596,7 @@
 </p:notes>
 </file>
 
-<file path=ppt/notesSlides/notesSlide8.xml><?xml version="1.0" encoding="utf-8"?>
+<file path=ppt/notesSlides/notesSlide9.xml><?xml version="1.0" encoding="utf-8"?>
 <p:notes xmlns:a="http://schemas.openxmlformats.org/drawingml/2006/main" xmlns:r="http://schemas.openxmlformats.org/officeDocument/2006/relationships" xmlns:p="http://schemas.openxmlformats.org/presentationml/2006/main">
   <p:cSld>
     <p:spTree>
@@ -1492,7 +1692,7 @@
           <a:p>
             <a:fld id="{2107F482-7FF7-4DD4-AE91-ACA70D5B43D5}" type="slidenum">
               <a:rPr lang="es-CL" smtClean="0"/>
-              <a:t>10</a:t>
+              <a:t>11</a:t>
             </a:fld>
             <a:endParaRPr lang="es-CL"/>
           </a:p>
@@ -1502,121 +1702,6 @@
     <p:extLst>
       <p:ext uri="{BB962C8B-B14F-4D97-AF65-F5344CB8AC3E}">
         <p14:creationId xmlns:p14="http://schemas.microsoft.com/office/powerpoint/2010/main" val="3623310349"/>
-      </p:ext>
-    </p:extLst>
-  </p:cSld>
-  <p:clrMapOvr>
-    <a:masterClrMapping/>
-  </p:clrMapOvr>
-</p:notes>
-</file>
-
-<file path=ppt/notesSlides/notesSlide9.xml><?xml version="1.0" encoding="utf-8"?>
-<p:notes xmlns:a="http://schemas.openxmlformats.org/drawingml/2006/main" xmlns:r="http://schemas.openxmlformats.org/officeDocument/2006/relationships" xmlns:p="http://schemas.openxmlformats.org/presentationml/2006/main">
-  <p:cSld>
-    <p:spTree>
-      <p:nvGrpSpPr>
-        <p:cNvPr id="1" name="">
-          <a:extLst>
-            <a:ext uri="{FF2B5EF4-FFF2-40B4-BE49-F238E27FC236}">
-              <a16:creationId xmlns:a16="http://schemas.microsoft.com/office/drawing/2014/main" id="{D202B77B-5072-5F1C-0F10-0F491EF9CD7B}"/>
-            </a:ext>
-          </a:extLst>
-        </p:cNvPr>
-        <p:cNvGrpSpPr/>
-        <p:nvPr/>
-      </p:nvGrpSpPr>
-      <p:grpSpPr>
-        <a:xfrm>
-          <a:off x="0" y="0"/>
-          <a:ext cx="0" cy="0"/>
-          <a:chOff x="0" y="0"/>
-          <a:chExt cx="0" cy="0"/>
-        </a:xfrm>
-      </p:grpSpPr>
-      <p:sp>
-        <p:nvSpPr>
-          <p:cNvPr id="2" name="Marcador de imagen de diapositiva 1">
-            <a:extLst>
-              <a:ext uri="{FF2B5EF4-FFF2-40B4-BE49-F238E27FC236}">
-                <a16:creationId xmlns:a16="http://schemas.microsoft.com/office/drawing/2014/main" id="{07F49A66-BCE5-9419-631E-18BA30ED1CFD}"/>
-              </a:ext>
-            </a:extLst>
-          </p:cNvPr>
-          <p:cNvSpPr>
-            <a:spLocks noGrp="1" noRot="1" noChangeAspect="1"/>
-          </p:cNvSpPr>
-          <p:nvPr>
-            <p:ph type="sldImg"/>
-          </p:nvPr>
-        </p:nvSpPr>
-        <p:spPr/>
-        <p:txBody>
-          <a:bodyPr/>
-          <a:lstStyle/>
-          <a:p>
-            <a:endParaRPr lang="es-CL"/>
-          </a:p>
-        </p:txBody>
-      </p:sp>
-      <p:sp>
-        <p:nvSpPr>
-          <p:cNvPr id="3" name="Marcador de notas 2">
-            <a:extLst>
-              <a:ext uri="{FF2B5EF4-FFF2-40B4-BE49-F238E27FC236}">
-                <a16:creationId xmlns:a16="http://schemas.microsoft.com/office/drawing/2014/main" id="{F6441215-2564-E539-3753-60DE68CF8A6D}"/>
-              </a:ext>
-            </a:extLst>
-          </p:cNvPr>
-          <p:cNvSpPr>
-            <a:spLocks noGrp="1"/>
-          </p:cNvSpPr>
-          <p:nvPr>
-            <p:ph type="body" idx="1"/>
-          </p:nvPr>
-        </p:nvSpPr>
-        <p:spPr/>
-        <p:txBody>
-          <a:bodyPr/>
-          <a:lstStyle/>
-          <a:p>
-            <a:endParaRPr lang="es-CL" dirty="0"/>
-          </a:p>
-        </p:txBody>
-      </p:sp>
-      <p:sp>
-        <p:nvSpPr>
-          <p:cNvPr id="4" name="Marcador de número de diapositiva 3">
-            <a:extLst>
-              <a:ext uri="{FF2B5EF4-FFF2-40B4-BE49-F238E27FC236}">
-                <a16:creationId xmlns:a16="http://schemas.microsoft.com/office/drawing/2014/main" id="{F268D863-15C2-C2CB-8958-1953C0F225CD}"/>
-              </a:ext>
-            </a:extLst>
-          </p:cNvPr>
-          <p:cNvSpPr>
-            <a:spLocks noGrp="1"/>
-          </p:cNvSpPr>
-          <p:nvPr>
-            <p:ph type="sldNum" sz="quarter" idx="5"/>
-          </p:nvPr>
-        </p:nvSpPr>
-        <p:spPr/>
-        <p:txBody>
-          <a:bodyPr/>
-          <a:lstStyle/>
-          <a:p>
-            <a:fld id="{2107F482-7FF7-4DD4-AE91-ACA70D5B43D5}" type="slidenum">
-              <a:rPr lang="es-CL" smtClean="0"/>
-              <a:t>11</a:t>
-            </a:fld>
-            <a:endParaRPr lang="es-CL"/>
-          </a:p>
-        </p:txBody>
-      </p:sp>
-    </p:spTree>
-    <p:extLst>
-      <p:ext uri="{BB962C8B-B14F-4D97-AF65-F5344CB8AC3E}">
-        <p14:creationId xmlns:p14="http://schemas.microsoft.com/office/powerpoint/2010/main" val="2153837920"/>
       </p:ext>
     </p:extLst>
   </p:cSld>
@@ -1775,7 +1860,7 @@
           <a:p>
             <a:fld id="{E8BDA46D-A1A7-4D05-A86A-5A57D57622A5}" type="datetimeFigureOut">
               <a:rPr lang="es-CL" smtClean="0"/>
-              <a:t>05-04-2026</a:t>
+              <a:t>07-04-2026</a:t>
             </a:fld>
             <a:endParaRPr lang="es-CL"/>
           </a:p>
@@ -1975,7 +2060,7 @@
           <a:p>
             <a:fld id="{E8BDA46D-A1A7-4D05-A86A-5A57D57622A5}" type="datetimeFigureOut">
               <a:rPr lang="es-CL" smtClean="0"/>
-              <a:t>05-04-2026</a:t>
+              <a:t>07-04-2026</a:t>
             </a:fld>
             <a:endParaRPr lang="es-CL"/>
           </a:p>
@@ -2185,7 +2270,7 @@
           <a:p>
             <a:fld id="{E8BDA46D-A1A7-4D05-A86A-5A57D57622A5}" type="datetimeFigureOut">
               <a:rPr lang="es-CL" smtClean="0"/>
-              <a:t>05-04-2026</a:t>
+              <a:t>07-04-2026</a:t>
             </a:fld>
             <a:endParaRPr lang="es-CL"/>
           </a:p>
@@ -2385,7 +2470,7 @@
           <a:p>
             <a:fld id="{E8BDA46D-A1A7-4D05-A86A-5A57D57622A5}" type="datetimeFigureOut">
               <a:rPr lang="es-CL" smtClean="0"/>
-              <a:t>05-04-2026</a:t>
+              <a:t>07-04-2026</a:t>
             </a:fld>
             <a:endParaRPr lang="es-CL"/>
           </a:p>
@@ -2661,7 +2746,7 @@
           <a:p>
             <a:fld id="{E8BDA46D-A1A7-4D05-A86A-5A57D57622A5}" type="datetimeFigureOut">
               <a:rPr lang="es-CL" smtClean="0"/>
-              <a:t>05-04-2026</a:t>
+              <a:t>07-04-2026</a:t>
             </a:fld>
             <a:endParaRPr lang="es-CL"/>
           </a:p>
@@ -2929,7 +3014,7 @@
           <a:p>
             <a:fld id="{E8BDA46D-A1A7-4D05-A86A-5A57D57622A5}" type="datetimeFigureOut">
               <a:rPr lang="es-CL" smtClean="0"/>
-              <a:t>05-04-2026</a:t>
+              <a:t>07-04-2026</a:t>
             </a:fld>
             <a:endParaRPr lang="es-CL"/>
           </a:p>
@@ -3344,7 +3429,7 @@
           <a:p>
             <a:fld id="{E8BDA46D-A1A7-4D05-A86A-5A57D57622A5}" type="datetimeFigureOut">
               <a:rPr lang="es-CL" smtClean="0"/>
-              <a:t>05-04-2026</a:t>
+              <a:t>07-04-2026</a:t>
             </a:fld>
             <a:endParaRPr lang="es-CL"/>
           </a:p>
@@ -3486,7 +3571,7 @@
           <a:p>
             <a:fld id="{E8BDA46D-A1A7-4D05-A86A-5A57D57622A5}" type="datetimeFigureOut">
               <a:rPr lang="es-CL" smtClean="0"/>
-              <a:t>05-04-2026</a:t>
+              <a:t>07-04-2026</a:t>
             </a:fld>
             <a:endParaRPr lang="es-CL"/>
           </a:p>
@@ -3599,7 +3684,7 @@
           <a:p>
             <a:fld id="{E8BDA46D-A1A7-4D05-A86A-5A57D57622A5}" type="datetimeFigureOut">
               <a:rPr lang="es-CL" smtClean="0"/>
-              <a:t>05-04-2026</a:t>
+              <a:t>07-04-2026</a:t>
             </a:fld>
             <a:endParaRPr lang="es-CL"/>
           </a:p>
@@ -3912,7 +3997,7 @@
           <a:p>
             <a:fld id="{E8BDA46D-A1A7-4D05-A86A-5A57D57622A5}" type="datetimeFigureOut">
               <a:rPr lang="es-CL" smtClean="0"/>
-              <a:t>05-04-2026</a:t>
+              <a:t>07-04-2026</a:t>
             </a:fld>
             <a:endParaRPr lang="es-CL"/>
           </a:p>
@@ -4201,7 +4286,7 @@
           <a:p>
             <a:fld id="{E8BDA46D-A1A7-4D05-A86A-5A57D57622A5}" type="datetimeFigureOut">
               <a:rPr lang="es-CL" smtClean="0"/>
-              <a:t>05-04-2026</a:t>
+              <a:t>07-04-2026</a:t>
             </a:fld>
             <a:endParaRPr lang="es-CL"/>
           </a:p>
@@ -4444,7 +4529,7 @@
           <a:p>
             <a:fld id="{E8BDA46D-A1A7-4D05-A86A-5A57D57622A5}" type="datetimeFigureOut">
               <a:rPr lang="es-CL" smtClean="0"/>
-              <a:t>05-04-2026</a:t>
+              <a:t>07-04-2026</a:t>
             </a:fld>
             <a:endParaRPr lang="es-CL"/>
           </a:p>
@@ -5208,6 +5293,444 @@
         <p:cNvPr id="1" name="">
           <a:extLst>
             <a:ext uri="{FF2B5EF4-FFF2-40B4-BE49-F238E27FC236}">
+              <a16:creationId xmlns:a16="http://schemas.microsoft.com/office/drawing/2014/main" id="{5694ABC1-2A54-DE94-1BDB-BF105A78EB44}"/>
+            </a:ext>
+          </a:extLst>
+        </p:cNvPr>
+        <p:cNvGrpSpPr/>
+        <p:nvPr/>
+      </p:nvGrpSpPr>
+      <p:grpSpPr>
+        <a:xfrm>
+          <a:off x="0" y="0"/>
+          <a:ext cx="0" cy="0"/>
+          <a:chOff x="0" y="0"/>
+          <a:chExt cx="0" cy="0"/>
+        </a:xfrm>
+      </p:grpSpPr>
+      <p:pic>
+        <p:nvPicPr>
+          <p:cNvPr id="4" name="Picture 2" descr="Duoc UC - Learn Chile">
+            <a:extLst>
+              <a:ext uri="{FF2B5EF4-FFF2-40B4-BE49-F238E27FC236}">
+                <a16:creationId xmlns:a16="http://schemas.microsoft.com/office/drawing/2014/main" id="{5B0A4AFC-BA10-E59A-F893-F748F748C3EB}"/>
+              </a:ext>
+            </a:extLst>
+          </p:cNvPr>
+          <p:cNvPicPr>
+            <a:picLocks noChangeAspect="1" noChangeArrowheads="1"/>
+          </p:cNvPicPr>
+          <p:nvPr/>
+        </p:nvPicPr>
+        <p:blipFill>
+          <a:blip r:embed="rId3">
+            <a:extLst>
+              <a:ext uri="{28A0092B-C50C-407E-A947-70E740481C1C}">
+                <a14:useLocalDpi xmlns:a14="http://schemas.microsoft.com/office/drawing/2010/main" val="0"/>
+              </a:ext>
+            </a:extLst>
+          </a:blip>
+          <a:srcRect/>
+          <a:stretch>
+            <a:fillRect/>
+          </a:stretch>
+        </p:blipFill>
+        <p:spPr bwMode="auto">
+          <a:xfrm>
+            <a:off x="11135913" y="30480"/>
+            <a:ext cx="974807" cy="825402"/>
+          </a:xfrm>
+          <a:prstGeom prst="rect">
+            <a:avLst/>
+          </a:prstGeom>
+          <a:noFill/>
+          <a:extLst>
+            <a:ext uri="{909E8E84-426E-40DD-AFC4-6F175D3DCCD1}">
+              <a14:hiddenFill xmlns:a14="http://schemas.microsoft.com/office/drawing/2010/main">
+                <a:solidFill>
+                  <a:srgbClr val="FFFFFF"/>
+                </a:solidFill>
+              </a14:hiddenFill>
+            </a:ext>
+          </a:extLst>
+        </p:spPr>
+      </p:pic>
+      <p:sp>
+        <p:nvSpPr>
+          <p:cNvPr id="2" name="Título 1">
+            <a:extLst>
+              <a:ext uri="{FF2B5EF4-FFF2-40B4-BE49-F238E27FC236}">
+                <a16:creationId xmlns:a16="http://schemas.microsoft.com/office/drawing/2014/main" id="{8ABA249A-BAB2-D99D-BCDB-31187E37E729}"/>
+              </a:ext>
+            </a:extLst>
+          </p:cNvPr>
+          <p:cNvSpPr txBox="1">
+            <a:spLocks/>
+          </p:cNvSpPr>
+          <p:nvPr/>
+        </p:nvSpPr>
+        <p:spPr>
+          <a:xfrm>
+            <a:off x="989606" y="284087"/>
+            <a:ext cx="9768840" cy="1325563"/>
+          </a:xfrm>
+          <a:prstGeom prst="rect">
+            <a:avLst/>
+          </a:prstGeom>
+        </p:spPr>
+        <p:txBody>
+          <a:bodyPr vert="horz" lIns="91440" tIns="45720" rIns="91440" bIns="45720" rtlCol="0" anchor="ctr">
+            <a:normAutofit/>
+          </a:bodyPr>
+          <a:lstStyle>
+            <a:lvl1pPr algn="l" defTabSz="914400" rtl="0" eaLnBrk="1" latinLnBrk="0" hangingPunct="1">
+              <a:lnSpc>
+                <a:spcPct val="90000"/>
+              </a:lnSpc>
+              <a:spcBef>
+                <a:spcPct val="0"/>
+              </a:spcBef>
+              <a:buNone/>
+              <a:defRPr sz="4400" kern="1200">
+                <a:solidFill>
+                  <a:schemeClr val="tx1"/>
+                </a:solidFill>
+                <a:latin typeface="+mj-lt"/>
+                <a:ea typeface="+mj-ea"/>
+                <a:cs typeface="+mj-cs"/>
+              </a:defRPr>
+            </a:lvl1pPr>
+          </a:lstStyle>
+          <a:p>
+            <a:endParaRPr lang="es-CL" sz="3200" i="1" dirty="0"/>
+          </a:p>
+        </p:txBody>
+      </p:sp>
+      <p:sp>
+        <p:nvSpPr>
+          <p:cNvPr id="7" name="Título 1">
+            <a:extLst>
+              <a:ext uri="{FF2B5EF4-FFF2-40B4-BE49-F238E27FC236}">
+                <a16:creationId xmlns:a16="http://schemas.microsoft.com/office/drawing/2014/main" id="{2DC5EED2-0DB4-29A8-118D-3BFB6EE6A46B}"/>
+              </a:ext>
+            </a:extLst>
+          </p:cNvPr>
+          <p:cNvSpPr txBox="1">
+            <a:spLocks/>
+          </p:cNvSpPr>
+          <p:nvPr/>
+        </p:nvSpPr>
+        <p:spPr>
+          <a:xfrm>
+            <a:off x="616226" y="378157"/>
+            <a:ext cx="10515600" cy="1325563"/>
+          </a:xfrm>
+          <a:prstGeom prst="rect">
+            <a:avLst/>
+          </a:prstGeom>
+        </p:spPr>
+        <p:txBody>
+          <a:bodyPr vert="horz" lIns="91440" tIns="45720" rIns="91440" bIns="45720" rtlCol="0" anchor="ctr">
+            <a:normAutofit/>
+          </a:bodyPr>
+          <a:lstStyle>
+            <a:lvl1pPr algn="l" defTabSz="914400" rtl="0" eaLnBrk="1" latinLnBrk="0" hangingPunct="1">
+              <a:lnSpc>
+                <a:spcPct val="90000"/>
+              </a:lnSpc>
+              <a:spcBef>
+                <a:spcPct val="0"/>
+              </a:spcBef>
+              <a:buNone/>
+              <a:defRPr sz="4400" kern="1200">
+                <a:solidFill>
+                  <a:schemeClr val="tx1"/>
+                </a:solidFill>
+                <a:latin typeface="+mj-lt"/>
+                <a:ea typeface="+mj-ea"/>
+                <a:cs typeface="+mj-cs"/>
+              </a:defRPr>
+            </a:lvl1pPr>
+          </a:lstStyle>
+          <a:p>
+            <a:r>
+              <a:rPr lang="es-MX" b="1" i="1" dirty="0"/>
+              <a:t>Tools: </a:t>
+            </a:r>
+            <a:r>
+              <a:rPr lang="es-MX" i="1" dirty="0"/>
+              <a:t>La conexión con el entorno.</a:t>
+            </a:r>
+            <a:endParaRPr lang="es-CL" dirty="0"/>
+          </a:p>
+        </p:txBody>
+      </p:sp>
+      <p:sp>
+        <p:nvSpPr>
+          <p:cNvPr id="3" name="Título 5">
+            <a:extLst>
+              <a:ext uri="{FF2B5EF4-FFF2-40B4-BE49-F238E27FC236}">
+                <a16:creationId xmlns:a16="http://schemas.microsoft.com/office/drawing/2014/main" id="{B14265B0-A7DF-DE01-2FB5-EBC40ED76F73}"/>
+              </a:ext>
+            </a:extLst>
+          </p:cNvPr>
+          <p:cNvSpPr>
+            <a:spLocks noGrp="1"/>
+          </p:cNvSpPr>
+          <p:nvPr>
+            <p:ph type="title"/>
+          </p:nvPr>
+        </p:nvSpPr>
+        <p:spPr>
+          <a:xfrm>
+            <a:off x="5740400" y="1609650"/>
+            <a:ext cx="5835374" cy="4217716"/>
+          </a:xfrm>
+        </p:spPr>
+        <p:txBody>
+          <a:bodyPr>
+            <a:noAutofit/>
+          </a:bodyPr>
+          <a:lstStyle/>
+          <a:p>
+            <a:r>
+              <a:rPr lang="es-MX" sz="2000" b="1" i="1" dirty="0" err="1"/>
+              <a:t>Function</a:t>
+            </a:r>
+            <a:r>
+              <a:rPr lang="es-MX" sz="2000" b="1" i="1" dirty="0"/>
+              <a:t> </a:t>
+            </a:r>
+            <a:r>
+              <a:rPr lang="es-MX" sz="2000" b="1" i="1" dirty="0" err="1"/>
+              <a:t>calling</a:t>
+            </a:r>
+            <a:r>
+              <a:rPr lang="es-MX" sz="2000" b="1" i="1" dirty="0"/>
+              <a:t> </a:t>
+            </a:r>
+            <a:r>
+              <a:rPr lang="es-MX" sz="2000" dirty="0"/>
+              <a:t>es una forma de llamar </a:t>
+            </a:r>
+            <a:r>
+              <a:rPr lang="es-MX" sz="2000" dirty="0" err="1"/>
+              <a:t>tools</a:t>
+            </a:r>
+            <a:r>
+              <a:rPr lang="es-MX" sz="2000" dirty="0"/>
+              <a:t> usando modelos de lenguaje.</a:t>
+            </a:r>
+            <a:br>
+              <a:rPr lang="es-MX" sz="2000" dirty="0"/>
+            </a:br>
+            <a:br>
+              <a:rPr lang="es-MX" sz="2000" dirty="0"/>
+            </a:br>
+            <a:r>
+              <a:rPr lang="es-MX" sz="2000" dirty="0"/>
+              <a:t>Los principales consejos que hay que tener al momento de usar </a:t>
+            </a:r>
+            <a:r>
+              <a:rPr lang="es-MX" sz="2000" dirty="0" err="1"/>
+              <a:t>tools</a:t>
+            </a:r>
+            <a:r>
+              <a:rPr lang="es-MX" sz="2000" dirty="0"/>
+              <a:t> son:</a:t>
+            </a:r>
+            <a:br>
+              <a:rPr lang="es-MX" sz="2000" dirty="0"/>
+            </a:br>
+            <a:r>
+              <a:rPr lang="es-MX" sz="2000" dirty="0"/>
+              <a:t>1- Definir correctamente el nombre de la </a:t>
+            </a:r>
+            <a:r>
+              <a:rPr lang="es-MX" sz="2000" dirty="0" err="1"/>
+              <a:t>tool</a:t>
+            </a:r>
+            <a:r>
+              <a:rPr lang="es-MX" sz="2000" dirty="0"/>
+              <a:t>.</a:t>
+            </a:r>
+            <a:br>
+              <a:rPr lang="es-MX" sz="2000" dirty="0"/>
+            </a:br>
+            <a:r>
+              <a:rPr lang="es-MX" sz="2000" dirty="0"/>
+              <a:t>2- Definir la funcionalidad de la </a:t>
+            </a:r>
+            <a:r>
+              <a:rPr lang="es-MX" sz="2000" dirty="0" err="1"/>
+              <a:t>tool</a:t>
+            </a:r>
+            <a:r>
+              <a:rPr lang="es-MX" sz="2000" dirty="0"/>
+              <a:t> (descripción).</a:t>
+            </a:r>
+            <a:br>
+              <a:rPr lang="es-MX" sz="2000" dirty="0"/>
+            </a:br>
+            <a:r>
+              <a:rPr lang="es-MX" sz="2000" dirty="0"/>
+              <a:t>3- Definir correctamente el nombre de los argumentos.</a:t>
+            </a:r>
+            <a:br>
+              <a:rPr lang="es-MX" sz="2000" dirty="0"/>
+            </a:br>
+            <a:r>
+              <a:rPr lang="es-MX" sz="2000" dirty="0"/>
+              <a:t>4- Definir el tipo de dato de los argumentos.</a:t>
+            </a:r>
+            <a:br>
+              <a:rPr lang="es-MX" sz="2000" dirty="0"/>
+            </a:br>
+            <a:r>
+              <a:rPr lang="es-MX" sz="2000" dirty="0"/>
+              <a:t>5- Definir los parámetros requeridos.</a:t>
+            </a:r>
+            <a:br>
+              <a:rPr lang="es-MX" sz="2000" dirty="0"/>
+            </a:br>
+            <a:br>
+              <a:rPr lang="es-MX" sz="2000" dirty="0"/>
+            </a:br>
+            <a:r>
+              <a:rPr lang="es-MX" sz="2000" dirty="0"/>
+              <a:t>Los modelos usan, seleccionan e implementan mejor las </a:t>
+            </a:r>
+            <a:r>
+              <a:rPr lang="es-MX" sz="2000" dirty="0" err="1"/>
+              <a:t>tools</a:t>
+            </a:r>
+            <a:r>
+              <a:rPr lang="es-MX" sz="2000" dirty="0"/>
+              <a:t> con mayor información.</a:t>
+            </a:r>
+            <a:endParaRPr lang="es-CL" sz="2000" dirty="0"/>
+          </a:p>
+        </p:txBody>
+      </p:sp>
+      <p:pic>
+        <p:nvPicPr>
+          <p:cNvPr id="12" name="Imagen 11">
+            <a:extLst>
+              <a:ext uri="{FF2B5EF4-FFF2-40B4-BE49-F238E27FC236}">
+                <a16:creationId xmlns:a16="http://schemas.microsoft.com/office/drawing/2014/main" id="{E73ACAF0-E075-AA08-5187-039254654794}"/>
+              </a:ext>
+            </a:extLst>
+          </p:cNvPr>
+          <p:cNvPicPr>
+            <a:picLocks noChangeAspect="1"/>
+          </p:cNvPicPr>
+          <p:nvPr/>
+        </p:nvPicPr>
+        <p:blipFill>
+          <a:blip r:embed="rId4"/>
+          <a:stretch>
+            <a:fillRect/>
+          </a:stretch>
+        </p:blipFill>
+        <p:spPr>
+          <a:xfrm>
+            <a:off x="370177" y="1469964"/>
+            <a:ext cx="5265079" cy="4591159"/>
+          </a:xfrm>
+          <a:prstGeom prst="rect">
+            <a:avLst/>
+          </a:prstGeom>
+        </p:spPr>
+      </p:pic>
+      <p:sp>
+        <p:nvSpPr>
+          <p:cNvPr id="13" name="Título 1">
+            <a:extLst>
+              <a:ext uri="{FF2B5EF4-FFF2-40B4-BE49-F238E27FC236}">
+                <a16:creationId xmlns:a16="http://schemas.microsoft.com/office/drawing/2014/main" id="{1C013FE8-C3B9-C0C6-869C-53F840F480C1}"/>
+              </a:ext>
+            </a:extLst>
+          </p:cNvPr>
+          <p:cNvSpPr txBox="1">
+            <a:spLocks/>
+          </p:cNvSpPr>
+          <p:nvPr/>
+        </p:nvSpPr>
+        <p:spPr>
+          <a:xfrm>
+            <a:off x="-163054" y="6235923"/>
+            <a:ext cx="5227814" cy="454119"/>
+          </a:xfrm>
+          <a:prstGeom prst="rect">
+            <a:avLst/>
+          </a:prstGeom>
+        </p:spPr>
+        <p:txBody>
+          <a:bodyPr vert="horz" lIns="91440" tIns="45720" rIns="91440" bIns="45720" rtlCol="0" anchor="ctr">
+            <a:normAutofit/>
+          </a:bodyPr>
+          <a:lstStyle>
+            <a:lvl1pPr algn="l" defTabSz="914400" rtl="0" eaLnBrk="1" latinLnBrk="0" hangingPunct="1">
+              <a:lnSpc>
+                <a:spcPct val="90000"/>
+              </a:lnSpc>
+              <a:spcBef>
+                <a:spcPct val="0"/>
+              </a:spcBef>
+              <a:buNone/>
+              <a:defRPr sz="4400" kern="1200">
+                <a:solidFill>
+                  <a:schemeClr val="tx1"/>
+                </a:solidFill>
+                <a:latin typeface="+mj-lt"/>
+                <a:ea typeface="+mj-ea"/>
+                <a:cs typeface="+mj-cs"/>
+              </a:defRPr>
+            </a:lvl1pPr>
+          </a:lstStyle>
+          <a:p>
+            <a:pPr algn="ctr"/>
+            <a:r>
+              <a:rPr lang="es-MX" sz="1600" b="1" i="1" dirty="0"/>
+              <a:t>Nota: </a:t>
+            </a:r>
+            <a:r>
+              <a:rPr lang="es-CL" sz="1600" i="1" dirty="0"/>
+              <a:t>Huyen, C. (2025). AI </a:t>
+            </a:r>
+            <a:r>
+              <a:rPr lang="es-CL" sz="1600" i="1" dirty="0" err="1"/>
+              <a:t>engineering</a:t>
+            </a:r>
+            <a:r>
+              <a:rPr lang="es-CL" sz="1600" i="1" dirty="0"/>
+              <a:t>. O'Reilly Media</a:t>
+            </a:r>
+            <a:endParaRPr lang="es-CL" sz="1600" b="1" i="1" dirty="0"/>
+          </a:p>
+        </p:txBody>
+      </p:sp>
+    </p:spTree>
+    <p:extLst>
+      <p:ext uri="{BB962C8B-B14F-4D97-AF65-F5344CB8AC3E}">
+        <p14:creationId xmlns:p14="http://schemas.microsoft.com/office/powerpoint/2010/main" val="205742363"/>
+      </p:ext>
+    </p:extLst>
+  </p:cSld>
+  <p:clrMapOvr>
+    <a:masterClrMapping/>
+  </p:clrMapOvr>
+</p:sld>
+</file>
+
+<file path=ppt/slides/slide11.xml><?xml version="1.0" encoding="utf-8"?>
+<p:sld xmlns:a="http://schemas.openxmlformats.org/drawingml/2006/main" xmlns:r="http://schemas.openxmlformats.org/officeDocument/2006/relationships" xmlns:p="http://schemas.openxmlformats.org/presentationml/2006/main">
+  <p:cSld>
+    <p:spTree>
+      <p:nvGrpSpPr>
+        <p:cNvPr id="1" name="">
+          <a:extLst>
+            <a:ext uri="{FF2B5EF4-FFF2-40B4-BE49-F238E27FC236}">
               <a16:creationId xmlns:a16="http://schemas.microsoft.com/office/drawing/2014/main" id="{CD948928-3075-EFD6-DB03-2681485637AC}"/>
             </a:ext>
           </a:extLst>
@@ -5610,7 +6133,7 @@
 </p:sld>
 </file>
 
-<file path=ppt/slides/slide11.xml><?xml version="1.0" encoding="utf-8"?>
+<file path=ppt/slides/slide12.xml><?xml version="1.0" encoding="utf-8"?>
 <p:sld xmlns:a="http://schemas.openxmlformats.org/drawingml/2006/main" xmlns:r="http://schemas.openxmlformats.org/officeDocument/2006/relationships" xmlns:p="http://schemas.openxmlformats.org/presentationml/2006/main">
   <p:cSld>
     <p:spTree>
@@ -5959,7 +6482,7 @@
 </p:sld>
 </file>
 
-<file path=ppt/slides/slide12.xml><?xml version="1.0" encoding="utf-8"?>
+<file path=ppt/slides/slide13.xml><?xml version="1.0" encoding="utf-8"?>
 <p:sld xmlns:a="http://schemas.openxmlformats.org/drawingml/2006/main" xmlns:r="http://schemas.openxmlformats.org/officeDocument/2006/relationships" xmlns:p="http://schemas.openxmlformats.org/presentationml/2006/main">
   <p:cSld>
     <p:spTree>
@@ -7017,6 +7540,226 @@
         <p:cNvPr id="1" name="">
           <a:extLst>
             <a:ext uri="{FF2B5EF4-FFF2-40B4-BE49-F238E27FC236}">
+              <a16:creationId xmlns:a16="http://schemas.microsoft.com/office/drawing/2014/main" id="{CA691389-B9B3-6A8A-8756-9D0FD8612901}"/>
+            </a:ext>
+          </a:extLst>
+        </p:cNvPr>
+        <p:cNvGrpSpPr/>
+        <p:nvPr/>
+      </p:nvGrpSpPr>
+      <p:grpSpPr>
+        <a:xfrm>
+          <a:off x="0" y="0"/>
+          <a:ext cx="0" cy="0"/>
+          <a:chOff x="0" y="0"/>
+          <a:chExt cx="0" cy="0"/>
+        </a:xfrm>
+      </p:grpSpPr>
+      <p:sp>
+        <p:nvSpPr>
+          <p:cNvPr id="2" name="Título 1">
+            <a:extLst>
+              <a:ext uri="{FF2B5EF4-FFF2-40B4-BE49-F238E27FC236}">
+                <a16:creationId xmlns:a16="http://schemas.microsoft.com/office/drawing/2014/main" id="{9F63CF06-6563-4796-4A20-892DAB426968}"/>
+              </a:ext>
+            </a:extLst>
+          </p:cNvPr>
+          <p:cNvSpPr>
+            <a:spLocks noGrp="1"/>
+          </p:cNvSpPr>
+          <p:nvPr>
+            <p:ph type="title"/>
+          </p:nvPr>
+        </p:nvSpPr>
+        <p:spPr>
+          <a:xfrm>
+            <a:off x="756920" y="288557"/>
+            <a:ext cx="10515600" cy="1325563"/>
+          </a:xfrm>
+        </p:spPr>
+        <p:txBody>
+          <a:bodyPr/>
+          <a:lstStyle/>
+          <a:p>
+            <a:r>
+              <a:rPr lang="es-MX" b="1" i="1" dirty="0"/>
+              <a:t>Noticias</a:t>
+            </a:r>
+            <a:r>
+              <a:rPr lang="es-MX" i="1" dirty="0"/>
+              <a:t>: Gemma 4, un modelo multimodal.</a:t>
+            </a:r>
+            <a:endParaRPr lang="es-CL" i="1" dirty="0"/>
+          </a:p>
+        </p:txBody>
+      </p:sp>
+      <p:pic>
+        <p:nvPicPr>
+          <p:cNvPr id="4" name="Picture 2" descr="Duoc UC - Learn Chile">
+            <a:extLst>
+              <a:ext uri="{FF2B5EF4-FFF2-40B4-BE49-F238E27FC236}">
+                <a16:creationId xmlns:a16="http://schemas.microsoft.com/office/drawing/2014/main" id="{68A50131-9CD3-1C56-0581-A54321FBF9BA}"/>
+              </a:ext>
+            </a:extLst>
+          </p:cNvPr>
+          <p:cNvPicPr>
+            <a:picLocks noChangeAspect="1" noChangeArrowheads="1"/>
+          </p:cNvPicPr>
+          <p:nvPr/>
+        </p:nvPicPr>
+        <p:blipFill>
+          <a:blip r:embed="rId3">
+            <a:extLst>
+              <a:ext uri="{28A0092B-C50C-407E-A947-70E740481C1C}">
+                <a14:useLocalDpi xmlns:a14="http://schemas.microsoft.com/office/drawing/2010/main" val="0"/>
+              </a:ext>
+            </a:extLst>
+          </a:blip>
+          <a:srcRect/>
+          <a:stretch>
+            <a:fillRect/>
+          </a:stretch>
+        </p:blipFill>
+        <p:spPr bwMode="auto">
+          <a:xfrm>
+            <a:off x="11135913" y="30480"/>
+            <a:ext cx="974807" cy="825402"/>
+          </a:xfrm>
+          <a:prstGeom prst="rect">
+            <a:avLst/>
+          </a:prstGeom>
+          <a:noFill/>
+          <a:extLst>
+            <a:ext uri="{909E8E84-426E-40DD-AFC4-6F175D3DCCD1}">
+              <a14:hiddenFill xmlns:a14="http://schemas.microsoft.com/office/drawing/2010/main">
+                <a:solidFill>
+                  <a:srgbClr val="FFFFFF"/>
+                </a:solidFill>
+              </a14:hiddenFill>
+            </a:ext>
+          </a:extLst>
+        </p:spPr>
+      </p:pic>
+      <p:pic>
+        <p:nvPicPr>
+          <p:cNvPr id="6" name="Imagen 5">
+            <a:extLst>
+              <a:ext uri="{FF2B5EF4-FFF2-40B4-BE49-F238E27FC236}">
+                <a16:creationId xmlns:a16="http://schemas.microsoft.com/office/drawing/2014/main" id="{A2C7CFF5-E0FE-AA5B-CC41-41FB1AE89C4F}"/>
+              </a:ext>
+            </a:extLst>
+          </p:cNvPr>
+          <p:cNvPicPr>
+            <a:picLocks noChangeAspect="1"/>
+          </p:cNvPicPr>
+          <p:nvPr/>
+        </p:nvPicPr>
+        <p:blipFill>
+          <a:blip r:embed="rId4"/>
+          <a:stretch>
+            <a:fillRect/>
+          </a:stretch>
+        </p:blipFill>
+        <p:spPr>
+          <a:xfrm>
+            <a:off x="5887648" y="1527077"/>
+            <a:ext cx="5735668" cy="3962604"/>
+          </a:xfrm>
+          <a:prstGeom prst="rect">
+            <a:avLst/>
+          </a:prstGeom>
+        </p:spPr>
+      </p:pic>
+      <p:pic>
+        <p:nvPicPr>
+          <p:cNvPr id="10" name="Imagen 9">
+            <a:extLst>
+              <a:ext uri="{FF2B5EF4-FFF2-40B4-BE49-F238E27FC236}">
+                <a16:creationId xmlns:a16="http://schemas.microsoft.com/office/drawing/2014/main" id="{72E1630F-8E5B-47AF-08A8-18C14589E46B}"/>
+              </a:ext>
+            </a:extLst>
+          </p:cNvPr>
+          <p:cNvPicPr>
+            <a:picLocks noChangeAspect="1"/>
+          </p:cNvPicPr>
+          <p:nvPr/>
+        </p:nvPicPr>
+        <p:blipFill>
+          <a:blip r:embed="rId5"/>
+          <a:stretch>
+            <a:fillRect/>
+          </a:stretch>
+        </p:blipFill>
+        <p:spPr>
+          <a:xfrm>
+            <a:off x="294640" y="1368319"/>
+            <a:ext cx="5341272" cy="4121362"/>
+          </a:xfrm>
+          <a:prstGeom prst="rect">
+            <a:avLst/>
+          </a:prstGeom>
+        </p:spPr>
+      </p:pic>
+      <p:sp>
+        <p:nvSpPr>
+          <p:cNvPr id="12" name="CuadroTexto 11">
+            <a:extLst>
+              <a:ext uri="{FF2B5EF4-FFF2-40B4-BE49-F238E27FC236}">
+                <a16:creationId xmlns:a16="http://schemas.microsoft.com/office/drawing/2014/main" id="{C31C4F34-98DA-5422-B71B-86A2CE15EBC9}"/>
+              </a:ext>
+            </a:extLst>
+          </p:cNvPr>
+          <p:cNvSpPr txBox="1"/>
+          <p:nvPr/>
+        </p:nvSpPr>
+        <p:spPr>
+          <a:xfrm>
+            <a:off x="294640" y="6323642"/>
+            <a:ext cx="6096000" cy="307777"/>
+          </a:xfrm>
+          <a:prstGeom prst="rect">
+            <a:avLst/>
+          </a:prstGeom>
+          <a:noFill/>
+        </p:spPr>
+        <p:txBody>
+          <a:bodyPr wrap="square">
+            <a:spAutoFit/>
+          </a:bodyPr>
+          <a:lstStyle/>
+          <a:p>
+            <a:r>
+              <a:rPr lang="es-CL" sz="1400" b="1" i="1" dirty="0"/>
+              <a:t>Nota</a:t>
+            </a:r>
+            <a:r>
+              <a:rPr lang="es-CL" sz="1400" dirty="0"/>
+              <a:t>: https://ollama.com/library/gemma4</a:t>
+            </a:r>
+          </a:p>
+        </p:txBody>
+      </p:sp>
+    </p:spTree>
+    <p:extLst>
+      <p:ext uri="{BB962C8B-B14F-4D97-AF65-F5344CB8AC3E}">
+        <p14:creationId xmlns:p14="http://schemas.microsoft.com/office/powerpoint/2010/main" val="941623845"/>
+      </p:ext>
+    </p:extLst>
+  </p:cSld>
+  <p:clrMapOvr>
+    <a:masterClrMapping/>
+  </p:clrMapOvr>
+</p:sld>
+</file>
+
+<file path=ppt/slides/slide4.xml><?xml version="1.0" encoding="utf-8"?>
+<p:sld xmlns:a="http://schemas.openxmlformats.org/drawingml/2006/main" xmlns:r="http://schemas.openxmlformats.org/officeDocument/2006/relationships" xmlns:p="http://schemas.openxmlformats.org/presentationml/2006/main">
+  <p:cSld>
+    <p:spTree>
+      <p:nvGrpSpPr>
+        <p:cNvPr id="1" name="">
+          <a:extLst>
+            <a:ext uri="{FF2B5EF4-FFF2-40B4-BE49-F238E27FC236}">
               <a16:creationId xmlns:a16="http://schemas.microsoft.com/office/drawing/2014/main" id="{01591BF0-E2F9-34FA-7A0F-0C7B3857CCA1}"/>
             </a:ext>
           </a:extLst>
@@ -7301,7 +8044,7 @@
 </p:sld>
 </file>
 
-<file path=ppt/slides/slide4.xml><?xml version="1.0" encoding="utf-8"?>
+<file path=ppt/slides/slide5.xml><?xml version="1.0" encoding="utf-8"?>
 <p:sld xmlns:a="http://schemas.openxmlformats.org/drawingml/2006/main" xmlns:r="http://schemas.openxmlformats.org/officeDocument/2006/relationships" xmlns:p="http://schemas.openxmlformats.org/presentationml/2006/main">
   <p:cSld>
     <p:spTree>
@@ -8162,7 +8905,7 @@
 </p:sld>
 </file>
 
-<file path=ppt/slides/slide5.xml><?xml version="1.0" encoding="utf-8"?>
+<file path=ppt/slides/slide6.xml><?xml version="1.0" encoding="utf-8"?>
 <p:sld xmlns:a="http://schemas.openxmlformats.org/drawingml/2006/main" xmlns:r="http://schemas.openxmlformats.org/officeDocument/2006/relationships" xmlns:p="http://schemas.openxmlformats.org/presentationml/2006/main">
   <p:cSld>
     <p:spTree>
@@ -8363,7 +9106,7 @@
 </p:sld>
 </file>
 
-<file path=ppt/slides/slide6.xml><?xml version="1.0" encoding="utf-8"?>
+<file path=ppt/slides/slide7.xml><?xml version="1.0" encoding="utf-8"?>
 <p:sld xmlns:a="http://schemas.openxmlformats.org/drawingml/2006/main" xmlns:r="http://schemas.openxmlformats.org/officeDocument/2006/relationships" xmlns:p="http://schemas.openxmlformats.org/presentationml/2006/main">
   <p:cSld>
     <p:spTree>
@@ -8786,7 +9529,7 @@
 </p:sld>
 </file>
 
-<file path=ppt/slides/slide7.xml><?xml version="1.0" encoding="utf-8"?>
+<file path=ppt/slides/slide8.xml><?xml version="1.0" encoding="utf-8"?>
 <p:sld xmlns:a="http://schemas.openxmlformats.org/drawingml/2006/main" xmlns:r="http://schemas.openxmlformats.org/officeDocument/2006/relationships" xmlns:p="http://schemas.openxmlformats.org/presentationml/2006/main">
   <p:cSld>
     <p:spTree>
@@ -9120,7 +9863,7 @@
 </p:sld>
 </file>
 
-<file path=ppt/slides/slide8.xml><?xml version="1.0" encoding="utf-8"?>
+<file path=ppt/slides/slide9.xml><?xml version="1.0" encoding="utf-8"?>
 <p:sld xmlns:a="http://schemas.openxmlformats.org/drawingml/2006/main" xmlns:r="http://schemas.openxmlformats.org/officeDocument/2006/relationships" xmlns:p="http://schemas.openxmlformats.org/presentationml/2006/main">
   <p:cSld>
     <p:spTree>
@@ -9426,444 +10169,6 @@
     <p:extLst>
       <p:ext uri="{BB962C8B-B14F-4D97-AF65-F5344CB8AC3E}">
         <p14:creationId xmlns:p14="http://schemas.microsoft.com/office/powerpoint/2010/main" val="4138735802"/>
-      </p:ext>
-    </p:extLst>
-  </p:cSld>
-  <p:clrMapOvr>
-    <a:masterClrMapping/>
-  </p:clrMapOvr>
-</p:sld>
-</file>
-
-<file path=ppt/slides/slide9.xml><?xml version="1.0" encoding="utf-8"?>
-<p:sld xmlns:a="http://schemas.openxmlformats.org/drawingml/2006/main" xmlns:r="http://schemas.openxmlformats.org/officeDocument/2006/relationships" xmlns:p="http://schemas.openxmlformats.org/presentationml/2006/main">
-  <p:cSld>
-    <p:spTree>
-      <p:nvGrpSpPr>
-        <p:cNvPr id="1" name="">
-          <a:extLst>
-            <a:ext uri="{FF2B5EF4-FFF2-40B4-BE49-F238E27FC236}">
-              <a16:creationId xmlns:a16="http://schemas.microsoft.com/office/drawing/2014/main" id="{5694ABC1-2A54-DE94-1BDB-BF105A78EB44}"/>
-            </a:ext>
-          </a:extLst>
-        </p:cNvPr>
-        <p:cNvGrpSpPr/>
-        <p:nvPr/>
-      </p:nvGrpSpPr>
-      <p:grpSpPr>
-        <a:xfrm>
-          <a:off x="0" y="0"/>
-          <a:ext cx="0" cy="0"/>
-          <a:chOff x="0" y="0"/>
-          <a:chExt cx="0" cy="0"/>
-        </a:xfrm>
-      </p:grpSpPr>
-      <p:pic>
-        <p:nvPicPr>
-          <p:cNvPr id="4" name="Picture 2" descr="Duoc UC - Learn Chile">
-            <a:extLst>
-              <a:ext uri="{FF2B5EF4-FFF2-40B4-BE49-F238E27FC236}">
-                <a16:creationId xmlns:a16="http://schemas.microsoft.com/office/drawing/2014/main" id="{5B0A4AFC-BA10-E59A-F893-F748F748C3EB}"/>
-              </a:ext>
-            </a:extLst>
-          </p:cNvPr>
-          <p:cNvPicPr>
-            <a:picLocks noChangeAspect="1" noChangeArrowheads="1"/>
-          </p:cNvPicPr>
-          <p:nvPr/>
-        </p:nvPicPr>
-        <p:blipFill>
-          <a:blip r:embed="rId3">
-            <a:extLst>
-              <a:ext uri="{28A0092B-C50C-407E-A947-70E740481C1C}">
-                <a14:useLocalDpi xmlns:a14="http://schemas.microsoft.com/office/drawing/2010/main" val="0"/>
-              </a:ext>
-            </a:extLst>
-          </a:blip>
-          <a:srcRect/>
-          <a:stretch>
-            <a:fillRect/>
-          </a:stretch>
-        </p:blipFill>
-        <p:spPr bwMode="auto">
-          <a:xfrm>
-            <a:off x="11135913" y="30480"/>
-            <a:ext cx="974807" cy="825402"/>
-          </a:xfrm>
-          <a:prstGeom prst="rect">
-            <a:avLst/>
-          </a:prstGeom>
-          <a:noFill/>
-          <a:extLst>
-            <a:ext uri="{909E8E84-426E-40DD-AFC4-6F175D3DCCD1}">
-              <a14:hiddenFill xmlns:a14="http://schemas.microsoft.com/office/drawing/2010/main">
-                <a:solidFill>
-                  <a:srgbClr val="FFFFFF"/>
-                </a:solidFill>
-              </a14:hiddenFill>
-            </a:ext>
-          </a:extLst>
-        </p:spPr>
-      </p:pic>
-      <p:sp>
-        <p:nvSpPr>
-          <p:cNvPr id="2" name="Título 1">
-            <a:extLst>
-              <a:ext uri="{FF2B5EF4-FFF2-40B4-BE49-F238E27FC236}">
-                <a16:creationId xmlns:a16="http://schemas.microsoft.com/office/drawing/2014/main" id="{8ABA249A-BAB2-D99D-BCDB-31187E37E729}"/>
-              </a:ext>
-            </a:extLst>
-          </p:cNvPr>
-          <p:cNvSpPr txBox="1">
-            <a:spLocks/>
-          </p:cNvSpPr>
-          <p:nvPr/>
-        </p:nvSpPr>
-        <p:spPr>
-          <a:xfrm>
-            <a:off x="989606" y="284087"/>
-            <a:ext cx="9768840" cy="1325563"/>
-          </a:xfrm>
-          <a:prstGeom prst="rect">
-            <a:avLst/>
-          </a:prstGeom>
-        </p:spPr>
-        <p:txBody>
-          <a:bodyPr vert="horz" lIns="91440" tIns="45720" rIns="91440" bIns="45720" rtlCol="0" anchor="ctr">
-            <a:normAutofit/>
-          </a:bodyPr>
-          <a:lstStyle>
-            <a:lvl1pPr algn="l" defTabSz="914400" rtl="0" eaLnBrk="1" latinLnBrk="0" hangingPunct="1">
-              <a:lnSpc>
-                <a:spcPct val="90000"/>
-              </a:lnSpc>
-              <a:spcBef>
-                <a:spcPct val="0"/>
-              </a:spcBef>
-              <a:buNone/>
-              <a:defRPr sz="4400" kern="1200">
-                <a:solidFill>
-                  <a:schemeClr val="tx1"/>
-                </a:solidFill>
-                <a:latin typeface="+mj-lt"/>
-                <a:ea typeface="+mj-ea"/>
-                <a:cs typeface="+mj-cs"/>
-              </a:defRPr>
-            </a:lvl1pPr>
-          </a:lstStyle>
-          <a:p>
-            <a:endParaRPr lang="es-CL" sz="3200" i="1" dirty="0"/>
-          </a:p>
-        </p:txBody>
-      </p:sp>
-      <p:sp>
-        <p:nvSpPr>
-          <p:cNvPr id="7" name="Título 1">
-            <a:extLst>
-              <a:ext uri="{FF2B5EF4-FFF2-40B4-BE49-F238E27FC236}">
-                <a16:creationId xmlns:a16="http://schemas.microsoft.com/office/drawing/2014/main" id="{2DC5EED2-0DB4-29A8-118D-3BFB6EE6A46B}"/>
-              </a:ext>
-            </a:extLst>
-          </p:cNvPr>
-          <p:cNvSpPr txBox="1">
-            <a:spLocks/>
-          </p:cNvSpPr>
-          <p:nvPr/>
-        </p:nvSpPr>
-        <p:spPr>
-          <a:xfrm>
-            <a:off x="616226" y="378157"/>
-            <a:ext cx="10515600" cy="1325563"/>
-          </a:xfrm>
-          <a:prstGeom prst="rect">
-            <a:avLst/>
-          </a:prstGeom>
-        </p:spPr>
-        <p:txBody>
-          <a:bodyPr vert="horz" lIns="91440" tIns="45720" rIns="91440" bIns="45720" rtlCol="0" anchor="ctr">
-            <a:normAutofit/>
-          </a:bodyPr>
-          <a:lstStyle>
-            <a:lvl1pPr algn="l" defTabSz="914400" rtl="0" eaLnBrk="1" latinLnBrk="0" hangingPunct="1">
-              <a:lnSpc>
-                <a:spcPct val="90000"/>
-              </a:lnSpc>
-              <a:spcBef>
-                <a:spcPct val="0"/>
-              </a:spcBef>
-              <a:buNone/>
-              <a:defRPr sz="4400" kern="1200">
-                <a:solidFill>
-                  <a:schemeClr val="tx1"/>
-                </a:solidFill>
-                <a:latin typeface="+mj-lt"/>
-                <a:ea typeface="+mj-ea"/>
-                <a:cs typeface="+mj-cs"/>
-              </a:defRPr>
-            </a:lvl1pPr>
-          </a:lstStyle>
-          <a:p>
-            <a:r>
-              <a:rPr lang="es-MX" b="1" i="1" dirty="0"/>
-              <a:t>Tools: </a:t>
-            </a:r>
-            <a:r>
-              <a:rPr lang="es-MX" i="1" dirty="0"/>
-              <a:t>La conexión con el entorno.</a:t>
-            </a:r>
-            <a:endParaRPr lang="es-CL" dirty="0"/>
-          </a:p>
-        </p:txBody>
-      </p:sp>
-      <p:sp>
-        <p:nvSpPr>
-          <p:cNvPr id="3" name="Título 5">
-            <a:extLst>
-              <a:ext uri="{FF2B5EF4-FFF2-40B4-BE49-F238E27FC236}">
-                <a16:creationId xmlns:a16="http://schemas.microsoft.com/office/drawing/2014/main" id="{B14265B0-A7DF-DE01-2FB5-EBC40ED76F73}"/>
-              </a:ext>
-            </a:extLst>
-          </p:cNvPr>
-          <p:cNvSpPr>
-            <a:spLocks noGrp="1"/>
-          </p:cNvSpPr>
-          <p:nvPr>
-            <p:ph type="title"/>
-          </p:nvPr>
-        </p:nvSpPr>
-        <p:spPr>
-          <a:xfrm>
-            <a:off x="5740400" y="1609650"/>
-            <a:ext cx="5835374" cy="4217716"/>
-          </a:xfrm>
-        </p:spPr>
-        <p:txBody>
-          <a:bodyPr>
-            <a:noAutofit/>
-          </a:bodyPr>
-          <a:lstStyle/>
-          <a:p>
-            <a:r>
-              <a:rPr lang="es-MX" sz="2000" b="1" i="1" dirty="0" err="1"/>
-              <a:t>Function</a:t>
-            </a:r>
-            <a:r>
-              <a:rPr lang="es-MX" sz="2000" b="1" i="1" dirty="0"/>
-              <a:t> </a:t>
-            </a:r>
-            <a:r>
-              <a:rPr lang="es-MX" sz="2000" b="1" i="1" dirty="0" err="1"/>
-              <a:t>calling</a:t>
-            </a:r>
-            <a:r>
-              <a:rPr lang="es-MX" sz="2000" b="1" i="1" dirty="0"/>
-              <a:t> </a:t>
-            </a:r>
-            <a:r>
-              <a:rPr lang="es-MX" sz="2000" dirty="0"/>
-              <a:t>es una forma de llamar </a:t>
-            </a:r>
-            <a:r>
-              <a:rPr lang="es-MX" sz="2000" dirty="0" err="1"/>
-              <a:t>tools</a:t>
-            </a:r>
-            <a:r>
-              <a:rPr lang="es-MX" sz="2000" dirty="0"/>
-              <a:t> usando modelos de lenguaje.</a:t>
-            </a:r>
-            <a:br>
-              <a:rPr lang="es-MX" sz="2000" dirty="0"/>
-            </a:br>
-            <a:br>
-              <a:rPr lang="es-MX" sz="2000" dirty="0"/>
-            </a:br>
-            <a:r>
-              <a:rPr lang="es-MX" sz="2000" dirty="0"/>
-              <a:t>Los principales consejos que hay que tener al momento de usar </a:t>
-            </a:r>
-            <a:r>
-              <a:rPr lang="es-MX" sz="2000" dirty="0" err="1"/>
-              <a:t>tools</a:t>
-            </a:r>
-            <a:r>
-              <a:rPr lang="es-MX" sz="2000" dirty="0"/>
-              <a:t> son:</a:t>
-            </a:r>
-            <a:br>
-              <a:rPr lang="es-MX" sz="2000" dirty="0"/>
-            </a:br>
-            <a:r>
-              <a:rPr lang="es-MX" sz="2000" dirty="0"/>
-              <a:t>1- Definir correctamente el nombre de la </a:t>
-            </a:r>
-            <a:r>
-              <a:rPr lang="es-MX" sz="2000" dirty="0" err="1"/>
-              <a:t>tool</a:t>
-            </a:r>
-            <a:r>
-              <a:rPr lang="es-MX" sz="2000" dirty="0"/>
-              <a:t>.</a:t>
-            </a:r>
-            <a:br>
-              <a:rPr lang="es-MX" sz="2000" dirty="0"/>
-            </a:br>
-            <a:r>
-              <a:rPr lang="es-MX" sz="2000" dirty="0"/>
-              <a:t>2- Definir la funcionalidad de la </a:t>
-            </a:r>
-            <a:r>
-              <a:rPr lang="es-MX" sz="2000" dirty="0" err="1"/>
-              <a:t>tool</a:t>
-            </a:r>
-            <a:r>
-              <a:rPr lang="es-MX" sz="2000" dirty="0"/>
-              <a:t> (descripción).</a:t>
-            </a:r>
-            <a:br>
-              <a:rPr lang="es-MX" sz="2000" dirty="0"/>
-            </a:br>
-            <a:r>
-              <a:rPr lang="es-MX" sz="2000" dirty="0"/>
-              <a:t>3- Definir correctamente el nombre de los argumentos.</a:t>
-            </a:r>
-            <a:br>
-              <a:rPr lang="es-MX" sz="2000" dirty="0"/>
-            </a:br>
-            <a:r>
-              <a:rPr lang="es-MX" sz="2000" dirty="0"/>
-              <a:t>4- Definir el tipo de dato de los argumentos.</a:t>
-            </a:r>
-            <a:br>
-              <a:rPr lang="es-MX" sz="2000" dirty="0"/>
-            </a:br>
-            <a:r>
-              <a:rPr lang="es-MX" sz="2000" dirty="0"/>
-              <a:t>5- Definir los parámetros requeridos.</a:t>
-            </a:r>
-            <a:br>
-              <a:rPr lang="es-MX" sz="2000" dirty="0"/>
-            </a:br>
-            <a:br>
-              <a:rPr lang="es-MX" sz="2000" dirty="0"/>
-            </a:br>
-            <a:r>
-              <a:rPr lang="es-MX" sz="2000" dirty="0"/>
-              <a:t>Los modelos usan, seleccionan e implementan mejor las </a:t>
-            </a:r>
-            <a:r>
-              <a:rPr lang="es-MX" sz="2000" dirty="0" err="1"/>
-              <a:t>tools</a:t>
-            </a:r>
-            <a:r>
-              <a:rPr lang="es-MX" sz="2000" dirty="0"/>
-              <a:t> con mayor información.</a:t>
-            </a:r>
-            <a:endParaRPr lang="es-CL" sz="2000" dirty="0"/>
-          </a:p>
-        </p:txBody>
-      </p:sp>
-      <p:pic>
-        <p:nvPicPr>
-          <p:cNvPr id="12" name="Imagen 11">
-            <a:extLst>
-              <a:ext uri="{FF2B5EF4-FFF2-40B4-BE49-F238E27FC236}">
-                <a16:creationId xmlns:a16="http://schemas.microsoft.com/office/drawing/2014/main" id="{E73ACAF0-E075-AA08-5187-039254654794}"/>
-              </a:ext>
-            </a:extLst>
-          </p:cNvPr>
-          <p:cNvPicPr>
-            <a:picLocks noChangeAspect="1"/>
-          </p:cNvPicPr>
-          <p:nvPr/>
-        </p:nvPicPr>
-        <p:blipFill>
-          <a:blip r:embed="rId4"/>
-          <a:stretch>
-            <a:fillRect/>
-          </a:stretch>
-        </p:blipFill>
-        <p:spPr>
-          <a:xfrm>
-            <a:off x="370177" y="1469964"/>
-            <a:ext cx="5265079" cy="4591159"/>
-          </a:xfrm>
-          <a:prstGeom prst="rect">
-            <a:avLst/>
-          </a:prstGeom>
-        </p:spPr>
-      </p:pic>
-      <p:sp>
-        <p:nvSpPr>
-          <p:cNvPr id="13" name="Título 1">
-            <a:extLst>
-              <a:ext uri="{FF2B5EF4-FFF2-40B4-BE49-F238E27FC236}">
-                <a16:creationId xmlns:a16="http://schemas.microsoft.com/office/drawing/2014/main" id="{1C013FE8-C3B9-C0C6-869C-53F840F480C1}"/>
-              </a:ext>
-            </a:extLst>
-          </p:cNvPr>
-          <p:cNvSpPr txBox="1">
-            <a:spLocks/>
-          </p:cNvSpPr>
-          <p:nvPr/>
-        </p:nvSpPr>
-        <p:spPr>
-          <a:xfrm>
-            <a:off x="-163054" y="6235923"/>
-            <a:ext cx="5227814" cy="454119"/>
-          </a:xfrm>
-          <a:prstGeom prst="rect">
-            <a:avLst/>
-          </a:prstGeom>
-        </p:spPr>
-        <p:txBody>
-          <a:bodyPr vert="horz" lIns="91440" tIns="45720" rIns="91440" bIns="45720" rtlCol="0" anchor="ctr">
-            <a:normAutofit/>
-          </a:bodyPr>
-          <a:lstStyle>
-            <a:lvl1pPr algn="l" defTabSz="914400" rtl="0" eaLnBrk="1" latinLnBrk="0" hangingPunct="1">
-              <a:lnSpc>
-                <a:spcPct val="90000"/>
-              </a:lnSpc>
-              <a:spcBef>
-                <a:spcPct val="0"/>
-              </a:spcBef>
-              <a:buNone/>
-              <a:defRPr sz="4400" kern="1200">
-                <a:solidFill>
-                  <a:schemeClr val="tx1"/>
-                </a:solidFill>
-                <a:latin typeface="+mj-lt"/>
-                <a:ea typeface="+mj-ea"/>
-                <a:cs typeface="+mj-cs"/>
-              </a:defRPr>
-            </a:lvl1pPr>
-          </a:lstStyle>
-          <a:p>
-            <a:pPr algn="ctr"/>
-            <a:r>
-              <a:rPr lang="es-MX" sz="1600" b="1" i="1" dirty="0"/>
-              <a:t>Nota: </a:t>
-            </a:r>
-            <a:r>
-              <a:rPr lang="es-CL" sz="1600" i="1" dirty="0"/>
-              <a:t>Huyen, C. (2025). AI </a:t>
-            </a:r>
-            <a:r>
-              <a:rPr lang="es-CL" sz="1600" i="1" dirty="0" err="1"/>
-              <a:t>engineering</a:t>
-            </a:r>
-            <a:r>
-              <a:rPr lang="es-CL" sz="1600" i="1" dirty="0"/>
-              <a:t>. O'Reilly Media</a:t>
-            </a:r>
-            <a:endParaRPr lang="es-CL" sz="1600" b="1" i="1" dirty="0"/>
-          </a:p>
-        </p:txBody>
-      </p:sp>
-    </p:spTree>
-    <p:extLst>
-      <p:ext uri="{BB962C8B-B14F-4D97-AF65-F5344CB8AC3E}">
-        <p14:creationId xmlns:p14="http://schemas.microsoft.com/office/powerpoint/2010/main" val="205742363"/>
       </p:ext>
     </p:extLst>
   </p:cSld>
